--- a/week-08/presentations/ppts/day-04-validation-finalization.pptx
+++ b/week-08/presentations/ppts/day-04-validation-finalization.pptx
@@ -5179,6 +5179,40 @@
           </a:p>
         </p:txBody>
       </p:sp>
+      <p:sp>
+        <p:nvSpPr>
+          <p:cNvPr id="3" name="Content Placeholder 2"/>
+          <p:cNvSpPr>
+            <a:spLocks noGrp="1"/>
+          </p:cNvSpPr>
+          <p:nvPr>
+            <p:ph idx="1"/>
+          </p:nvPr>
+        </p:nvSpPr>
+        <p:spPr/>
+        <p:txBody>
+          <a:bodyPr/>
+          <a:lstStyle/>
+          <a:p>
+            <a:pPr lvl="0" indent="0">
+              <a:buNone/>
+            </a:pPr>
+            <a:r>
+              <a:rPr>
+                <a:latin typeface="Courier"/>
+              </a:rPr>
+              <a:t>## 1. Stakeholder map (compressed)
+3 high-power stakeholders; P×I + RACI for 1 decision
+## 2. 1 Trade-off brief
+1 page; 1 TCD-light §5 trade-off, briefed for stakeholder
+## 3. 1 Simulated negotiation outcome
+- The ask
+- Anticipated response (top 1 objection + your response)
+- Anticipated agreement / deferral / escalation</a:t>
+            </a:r>
+          </a:p>
+        </p:txBody>
+      </p:sp>
     </p:spTree>
   </p:cSld>
 </p:sld>
@@ -5222,6 +5256,42 @@
             <a:r>
               <a:rPr/>
               <a:t>📝 DP-Light Template</a:t>
+            </a:r>
+          </a:p>
+        </p:txBody>
+      </p:sp>
+      <p:sp>
+        <p:nvSpPr>
+          <p:cNvPr id="3" name="Content Placeholder 2"/>
+          <p:cNvSpPr>
+            <a:spLocks noGrp="1"/>
+          </p:cNvSpPr>
+          <p:nvPr>
+            <p:ph idx="1"/>
+          </p:nvPr>
+        </p:nvSpPr>
+        <p:spPr/>
+        <p:txBody>
+          <a:bodyPr/>
+          <a:lstStyle/>
+          <a:p>
+            <a:pPr lvl="0" indent="0">
+              <a:buNone/>
+            </a:pPr>
+            <a:r>
+              <a:rPr>
+                <a:latin typeface="Courier"/>
+              </a:rPr>
+              <a:t>## 1. Outcome map (compressed)
+Primary + 2 supporting + 1 counter-outcome
+## 2. Backlog skeleton
+1 Epic + 1 Feature + 5 User Stories
+## 3. Tracking plan (compressed)
+3 leading indicators; 1 monthly cadence
+## 4. Value stream (compressed)
+Top 3 queues identified
+## 5. 1 Bottleneck removal experiment
+Hypothesis / test / success criterion</a:t>
             </a:r>
           </a:p>
         </p:txBody>

--- a/week-08/presentations/ppts/day-04-validation-finalization.pptx
+++ b/week-08/presentations/ppts/day-04-validation-finalization.pptx
@@ -5204,7 +5204,7 @@
               <a:t>## 1. Stakeholder map (compressed)
 3 high-power stakeholders; P×I + RACI for 1 decision
 ## 2. 1 Trade-off brief
-1 page; 1 TCD-light §5 trade-off, briefed for stakeholder
+1 page; 1 TCD-light Section 5 trade-off, briefed for stakeholder
 ## 3. 1 Simulated negotiation outcome
 - The ask
 - Anticipated response (top 1 objection + your response)
@@ -5594,7 +5594,7 @@
             </a:pPr>
             <a:r>
               <a:rPr/>
-              <a:t>Every cross-reference: specific (cite §, not “see TCD”); verified; adds value.</a:t>
+              <a:t>Every cross-reference: specific (cite Section, not “see TCD”); verified; adds value.</a:t>
             </a:r>
           </a:p>
         </p:txBody>

--- a/week-08/presentations/ppts/day-04-validation-finalization.pptx
+++ b/week-08/presentations/ppts/day-04-validation-finalization.pptx
@@ -5211,6 +5211,15 @@
 - Anticipated agreement / deferral / escalation</a:t>
             </a:r>
           </a:p>
+          <a:p>
+            <a:pPr lvl="0" indent="0" marL="0">
+              <a:buNone/>
+            </a:pPr>
+            <a:r>
+              <a:rPr/>
+              <a:t>The stakeholder map pairs power/interest with a RACI matrix (Responsible, Accountable, Consulted, Informed) for one decision.</a:t>
+            </a:r>
+          </a:p>
         </p:txBody>
       </p:sp>
     </p:spTree>
@@ -5540,25 +5549,25 @@
             </a:pPr>
             <a:r>
               <a:rPr/>
-              <a:t>PRD-light</a:t>
-            </a:r>
-          </a:p>
-          <a:p>
-            <a:pPr lvl="0" indent="0" marL="0">
-              <a:buNone/>
-            </a:pPr>
-            <a:r>
-              <a:rPr/>
-              <a:t>TCD-light</a:t>
-            </a:r>
-          </a:p>
-          <a:p>
-            <a:pPr lvl="0" indent="0" marL="0">
-              <a:buNone/>
-            </a:pPr>
-            <a:r>
-              <a:rPr/>
-              <a:t>TMD-light</a:t>
+              <a:t>Product Requirements Document (PRD-light)</a:t>
+            </a:r>
+          </a:p>
+          <a:p>
+            <a:pPr lvl="0" indent="0" marL="0">
+              <a:buNone/>
+            </a:pPr>
+            <a:r>
+              <a:rPr/>
+              <a:t>Technical Concept Document (TCD-light)</a:t>
+            </a:r>
+          </a:p>
+          <a:p>
+            <a:pPr lvl="0" indent="0" marL="0">
+              <a:buNone/>
+            </a:pPr>
+            <a:r>
+              <a:rPr/>
+              <a:t>Technical Modeling Document (TMD-light)</a:t>
             </a:r>
           </a:p>
           <a:p>
@@ -6626,7 +6635,7 @@
             </a:pPr>
             <a:r>
               <a:rPr/>
-              <a:t>Produce SEP-light (compressed Wk-6) and DP-light (compressed Wk-7)</a:t>
+              <a:t>Produce Stakeholder Engagement Plan (SEP-light) (compressed Wk-6) and Delivery Plan (DP-light) (compressed Wk-7)</a:t>
             </a:r>
           </a:p>
           <a:p>
@@ -7160,7 +7169,7 @@
             </a:pPr>
             <a:r>
               <a:rPr/>
-              <a:t>Most triads fail 2–3 on first pass. That’s expected; that’s why this day exists.</a:t>
+              <a:t>Most triads fail 2–3 on first pass. That’s expected; that’s why this day exists. The checks align acceptance criteria (AC), Service Level Objectives (SLOs), and non-functional requirements (NFRs) across artifacts.</a:t>
             </a:r>
           </a:p>
         </p:txBody>

--- a/week-08/presentations/ppts/day-04-validation-finalization.pptx
+++ b/week-08/presentations/ppts/day-04-validation-finalization.pptx
@@ -7217,6 +7217,42 @@
             <a:r>
               <a:rPr/>
               <a:t>📝 The Validation Log</a:t>
+            </a:r>
+          </a:p>
+        </p:txBody>
+      </p:sp>
+      <p:sp>
+        <p:nvSpPr>
+          <p:cNvPr id="3" name="Content Placeholder 2"/>
+          <p:cNvSpPr>
+            <a:spLocks noGrp="1"/>
+          </p:cNvSpPr>
+          <p:nvPr>
+            <p:ph idx="1"/>
+          </p:nvPr>
+        </p:nvSpPr>
+        <p:spPr/>
+        <p:txBody>
+          <a:bodyPr/>
+          <a:lstStyle/>
+          <a:p>
+            <a:pPr lvl="0" indent="0">
+              <a:buNone/>
+            </a:pPr>
+            <a:r>
+              <a:rPr>
+                <a:latin typeface="Courier"/>
+              </a:rPr>
+              <a:t>| # | Check | Status | Gap / fix |
+|---|-------|--------|-----------|
+| 1 | Outcome → metrics → SLOs | Pass | — |
+| 2 | Data model ↔ API | Partial | Missing FK; added |
+| 3 | API ↔ AC | Pass | — |
+| 4 | SLO ↔ sequence | Fail → Fixed | Sequence 800ms; SLO was 500ms;
+tightened SLO to p95 &lt; 1000ms |
+| 5 | NFRs ↔ architecture | Pass | — |
+| 6 | Trade-offs internal | Pass | — |
+| 7 | Stakeholders ↔ constraints | Partial | Compliance added |</a:t>
             </a:r>
           </a:p>
         </p:txBody>

--- a/week-08/presentations/ppts/day-04-validation-finalization.pptx
+++ b/week-08/presentations/ppts/day-04-validation-finalization.pptx
@@ -1118,7 +1118,7 @@
             </a:pPr>
             <a:r>
               <a:rPr/>
-              <a:t>All 3 triad voices speak. Customer + problem grounds the rest.</a:t>
+              <a:t>All 3 quad voices speak. Customer + problem grounds the rest.</a:t>
             </a:r>
           </a:p>
         </p:txBody>
@@ -1938,7 +1938,7 @@
             </a:pPr>
             <a:r>
               <a:rPr/>
-              <a:t>If a triad finishes in under 25 min, they didn’t walk references. Push.</a:t>
+              <a:t>If a quad finishes in under 25 min, they didn’t walk references. Push.</a:t>
             </a:r>
           </a:p>
         </p:txBody>
@@ -5375,7 +5375,7 @@
             </a:pPr>
             <a:r>
               <a:rPr b="1"/>
-              <a:t>Triads • 40 minutes</a:t>
+              <a:t>Quads • 40 minutes</a:t>
             </a:r>
           </a:p>
           <a:p>
@@ -5678,7 +5678,7 @@
             </a:pPr>
             <a:r>
               <a:rPr b="1"/>
-              <a:t>Triads • 40 minutes</a:t>
+              <a:t>Quads • 40 minutes</a:t>
             </a:r>
           </a:p>
           <a:p>
@@ -6197,16 +6197,16 @@
             </a:pPr>
             <a:r>
               <a:rPr b="1"/>
-              <a:t>Triads • 45 minutes • Wrap</a:t>
-            </a:r>
-          </a:p>
-          <a:p>
-            <a:pPr lvl="0" indent="0" marL="0">
-              <a:buNone/>
-            </a:pPr>
-            <a:r>
-              <a:rPr/>
-              <a:t>5 min: assign sections to triad members</a:t>
+              <a:t>Quads • 45 minutes • Wrap</a:t>
+            </a:r>
+          </a:p>
+          <a:p>
+            <a:pPr lvl="0" indent="0" marL="0">
+              <a:buNone/>
+            </a:pPr>
+            <a:r>
+              <a:rPr/>
+              <a:t>5 min: assign sections to quad members</a:t>
             </a:r>
           </a:p>
           <a:p>
@@ -6770,7 +6770,7 @@
             </a:pPr>
             <a:r>
               <a:rPr/>
-              <a:t>Pin Day-3 outputs + cross-triad findings</a:t>
+              <a:t>Pin Day-3 outputs + cross-quad findings</a:t>
             </a:r>
           </a:p>
           <a:p>
@@ -7169,7 +7169,7 @@
             </a:pPr>
             <a:r>
               <a:rPr/>
-              <a:t>Most triads fail 2–3 on first pass. That’s expected; that’s why this day exists. The checks align acceptance criteria (AC), Service Level Objectives (SLOs), and non-functional requirements (NFRs) across artifacts.</a:t>
+              <a:t>Most quads fail 2–3 on first pass. That’s expected; that’s why this day exists. The checks align acceptance criteria (AC), Service Level Objectives (SLOs), and non-functional requirements (NFRs) across artifacts.</a:t>
             </a:r>
           </a:p>
         </p:txBody>
@@ -7327,7 +7327,7 @@
             </a:pPr>
             <a:r>
               <a:rPr b="1"/>
-              <a:t>Triads • 40 minutes</a:t>
+              <a:t>Quads • 40 minutes</a:t>
             </a:r>
           </a:p>
           <a:p>

--- a/week-08/presentations/ppts/day-04-validation-finalization.pptx
+++ b/week-08/presentations/ppts/day-04-validation-finalization.pptx
@@ -5375,7 +5375,7 @@
             </a:pPr>
             <a:r>
               <a:rPr b="1"/>
-              <a:t>Quads • 40 minutes</a:t>
+              <a:t>Quads • 50 minutes</a:t>
             </a:r>
           </a:p>
           <a:p>
@@ -5678,7 +5678,7 @@
             </a:pPr>
             <a:r>
               <a:rPr b="1"/>
-              <a:t>Quads • 40 minutes</a:t>
+              <a:t>Quads • 50 minutes</a:t>
             </a:r>
           </a:p>
           <a:p>
@@ -6197,7 +6197,7 @@
             </a:pPr>
             <a:r>
               <a:rPr b="1"/>
-              <a:t>Quads • 45 minutes • Wrap</a:t>
+              <a:t>Quads • 55 minutes • Wrap</a:t>
             </a:r>
           </a:p>
           <a:p>
@@ -7327,7 +7327,7 @@
             </a:pPr>
             <a:r>
               <a:rPr b="1"/>
-              <a:t>Quads • 40 minutes</a:t>
+              <a:t>Quads • 45 minutes</a:t>
             </a:r>
           </a:p>
           <a:p>

--- a/week-08/presentations/ppts/day-04-validation-finalization.pptx
+++ b/week-08/presentations/ppts/day-04-validation-finalization.pptx
@@ -5384,7 +5384,7 @@
             </a:pPr>
             <a:r>
               <a:rPr/>
-              <a:t>20 min: SEP-light (3 stakeholders + brief + negotiation)</a:t>
+              <a:t>30 min: SEP-light (3 stakeholders + brief + negotiation)</a:t>
             </a:r>
           </a:p>
           <a:p>
@@ -5402,7 +5402,7 @@
             </a:pPr>
             <a:r>
               <a:rPr/>
-              <a:t>⏱ 20 + 20</a:t>
+              <a:t>⏱ 30 + 20</a:t>
             </a:r>
           </a:p>
         </p:txBody>
@@ -5687,7 +5687,7 @@
             </a:pPr>
             <a:r>
               <a:rPr/>
-              <a:t>15 min: solo read-through (each member reads all 6)</a:t>
+              <a:t>25 min: solo read-through (each member reads all 6)</a:t>
             </a:r>
           </a:p>
           <a:p>
@@ -5714,7 +5714,7 @@
             </a:pPr>
             <a:r>
               <a:rPr/>
-              <a:t>⏱ 15 + 10 + 15</a:t>
+              <a:t>⏱ 25 + 10 + 15</a:t>
             </a:r>
           </a:p>
         </p:txBody>
@@ -6215,7 +6215,7 @@
             </a:pPr>
             <a:r>
               <a:rPr/>
-              <a:t>15 min: run-through #1 (timer; nobody interrupts)</a:t>
+              <a:t>25 min: run-through #1 (timer; nobody interrupts)</a:t>
             </a:r>
           </a:p>
           <a:p>
@@ -6242,7 +6242,7 @@
             </a:pPr>
             <a:r>
               <a:rPr/>
-              <a:t>⏱ 5 + 15 + 10 + 15 · 15-min wrap</a:t>
+              <a:t>⏱ 5 + 25 + 10 + 15 · 15-min wrap</a:t>
             </a:r>
           </a:p>
         </p:txBody>
@@ -7336,7 +7336,7 @@
             </a:pPr>
             <a:r>
               <a:rPr/>
-              <a:t>40 min: walk all 7 checks; document log; fix gaps</a:t>
+              <a:t>45 min: walk all 7 checks; document log; fix gaps</a:t>
             </a:r>
           </a:p>
           <a:p>
